--- a/France titre fonctionnement de A à Z/Yggdrasil_France_Titres_3.pptx
+++ b/France titre fonctionnement de A à Z/Yggdrasil_France_Titres_3.pptx
@@ -1843,6 +1843,46 @@
           </a:p>
         </p:txBody>
       </p:sp>
+      <p:sp>
+        <p:nvSpPr>
+          <p:cNvPr id="11" name="ZoneTexte 10">
+            <a:extLst>
+              <a:ext uri="{FF2B5EF4-FFF2-40B4-BE49-F238E27FC236}">
+                <a16:creationId xmlns:a16="http://schemas.microsoft.com/office/drawing/2014/main" id="{7FAA6638-4499-0A7E-F6CE-BE65DF8D4D2C}"/>
+              </a:ext>
+            </a:extLst>
+          </p:cNvPr>
+          <p:cNvSpPr txBox="1"/>
+          <p:nvPr/>
+        </p:nvSpPr>
+        <p:spPr>
+          <a:xfrm>
+            <a:off x="0" y="6578600"/>
+            <a:ext cx="12192000" cy="230832"/>
+          </a:xfrm>
+          <a:prstGeom prst="rect">
+            <a:avLst/>
+          </a:prstGeom>
+          <a:noFill/>
+        </p:spPr>
+        <p:txBody>
+          <a:bodyPr vert="horz" rtlCol="0">
+            <a:spAutoFit/>
+          </a:bodyPr>
+          <a:lstStyle/>
+          <a:p>
+            <a:pPr algn="ctr"/>
+            <a:r>
+              <a:rPr lang="fr-FR" sz="900">
+                <a:solidFill>
+                  <a:srgbClr val="B4B4B4"/>
+                </a:solidFill>
+              </a:rPr>
+              <a:t>(c) titi_23 - mediateur-numerique.github.io - Reproduction interdite sans autorisation</a:t>
+            </a:r>
+          </a:p>
+        </p:txBody>
+      </p:sp>
     </p:spTree>
   </p:cSld>
   <p:clrMapOvr>
@@ -2640,6 +2680,46 @@
               <a:t>Votre médiateur numérique Yggdrasil pendant l'atelier</a:t>
             </a:r>
             <a:endParaRPr lang="en-US" sz="1200" dirty="0"/>
+          </a:p>
+        </p:txBody>
+      </p:sp>
+      <p:sp>
+        <p:nvSpPr>
+          <p:cNvPr id="22" name="ZoneTexte 21">
+            <a:extLst>
+              <a:ext uri="{FF2B5EF4-FFF2-40B4-BE49-F238E27FC236}">
+                <a16:creationId xmlns:a16="http://schemas.microsoft.com/office/drawing/2014/main" id="{F9E6161D-A371-CA78-A5DC-71FE2022B750}"/>
+              </a:ext>
+            </a:extLst>
+          </p:cNvPr>
+          <p:cNvSpPr txBox="1"/>
+          <p:nvPr/>
+        </p:nvSpPr>
+        <p:spPr>
+          <a:xfrm>
+            <a:off x="0" y="6578600"/>
+            <a:ext cx="12192000" cy="230832"/>
+          </a:xfrm>
+          <a:prstGeom prst="rect">
+            <a:avLst/>
+          </a:prstGeom>
+          <a:noFill/>
+        </p:spPr>
+        <p:txBody>
+          <a:bodyPr vert="horz" rtlCol="0">
+            <a:spAutoFit/>
+          </a:bodyPr>
+          <a:lstStyle/>
+          <a:p>
+            <a:pPr algn="ctr"/>
+            <a:r>
+              <a:rPr lang="fr-FR" sz="900">
+                <a:solidFill>
+                  <a:srgbClr val="B4B4B4"/>
+                </a:solidFill>
+              </a:rPr>
+              <a:t>(c) titi_23 - mediateur-numerique.github.io - Reproduction interdite sans autorisation</a:t>
+            </a:r>
           </a:p>
         </p:txBody>
       </p:sp>
@@ -2856,6 +2936,46 @@
           </a:p>
         </p:txBody>
       </p:sp>
+      <p:sp>
+        <p:nvSpPr>
+          <p:cNvPr id="7" name="ZoneTexte 6">
+            <a:extLst>
+              <a:ext uri="{FF2B5EF4-FFF2-40B4-BE49-F238E27FC236}">
+                <a16:creationId xmlns:a16="http://schemas.microsoft.com/office/drawing/2014/main" id="{8F2D3FA1-202E-D76C-36CC-523E3FBCB8D1}"/>
+              </a:ext>
+            </a:extLst>
+          </p:cNvPr>
+          <p:cNvSpPr txBox="1"/>
+          <p:nvPr/>
+        </p:nvSpPr>
+        <p:spPr>
+          <a:xfrm>
+            <a:off x="0" y="6578600"/>
+            <a:ext cx="12192000" cy="230832"/>
+          </a:xfrm>
+          <a:prstGeom prst="rect">
+            <a:avLst/>
+          </a:prstGeom>
+          <a:noFill/>
+        </p:spPr>
+        <p:txBody>
+          <a:bodyPr vert="horz" rtlCol="0">
+            <a:spAutoFit/>
+          </a:bodyPr>
+          <a:lstStyle/>
+          <a:p>
+            <a:pPr algn="ctr"/>
+            <a:r>
+              <a:rPr lang="fr-FR" sz="900">
+                <a:solidFill>
+                  <a:srgbClr val="B4B4B4"/>
+                </a:solidFill>
+              </a:rPr>
+              <a:t>(c) titi_23 - mediateur-numerique.github.io - Reproduction interdite sans autorisation</a:t>
+            </a:r>
+          </a:p>
+        </p:txBody>
+      </p:sp>
     </p:spTree>
   </p:cSld>
   <p:clrMapOvr>
@@ -3474,6 +3594,46 @@
           </a:p>
         </p:txBody>
       </p:sp>
+      <p:sp>
+        <p:nvSpPr>
+          <p:cNvPr id="17" name="ZoneTexte 16">
+            <a:extLst>
+              <a:ext uri="{FF2B5EF4-FFF2-40B4-BE49-F238E27FC236}">
+                <a16:creationId xmlns:a16="http://schemas.microsoft.com/office/drawing/2014/main" id="{2ACFBDFE-8668-4597-8722-860BA5F67A03}"/>
+              </a:ext>
+            </a:extLst>
+          </p:cNvPr>
+          <p:cNvSpPr txBox="1"/>
+          <p:nvPr/>
+        </p:nvSpPr>
+        <p:spPr>
+          <a:xfrm>
+            <a:off x="0" y="6578600"/>
+            <a:ext cx="12192000" cy="230832"/>
+          </a:xfrm>
+          <a:prstGeom prst="rect">
+            <a:avLst/>
+          </a:prstGeom>
+          <a:noFill/>
+        </p:spPr>
+        <p:txBody>
+          <a:bodyPr vert="horz" rtlCol="0">
+            <a:spAutoFit/>
+          </a:bodyPr>
+          <a:lstStyle/>
+          <a:p>
+            <a:pPr algn="ctr"/>
+            <a:r>
+              <a:rPr lang="fr-FR" sz="900">
+                <a:solidFill>
+                  <a:srgbClr val="B4B4B4"/>
+                </a:solidFill>
+              </a:rPr>
+              <a:t>(c) titi_23 - mediateur-numerique.github.io - Reproduction interdite sans autorisation</a:t>
+            </a:r>
+          </a:p>
+        </p:txBody>
+      </p:sp>
     </p:spTree>
   </p:cSld>
   <p:clrMapOvr>
@@ -4252,6 +4412,46 @@
           </a:p>
         </p:txBody>
       </p:sp>
+      <p:sp>
+        <p:nvSpPr>
+          <p:cNvPr id="19" name="ZoneTexte 18">
+            <a:extLst>
+              <a:ext uri="{FF2B5EF4-FFF2-40B4-BE49-F238E27FC236}">
+                <a16:creationId xmlns:a16="http://schemas.microsoft.com/office/drawing/2014/main" id="{5E638BFB-EEA6-1519-66E2-DC268732C5AE}"/>
+              </a:ext>
+            </a:extLst>
+          </p:cNvPr>
+          <p:cNvSpPr txBox="1"/>
+          <p:nvPr/>
+        </p:nvSpPr>
+        <p:spPr>
+          <a:xfrm>
+            <a:off x="0" y="6578600"/>
+            <a:ext cx="12192000" cy="230832"/>
+          </a:xfrm>
+          <a:prstGeom prst="rect">
+            <a:avLst/>
+          </a:prstGeom>
+          <a:noFill/>
+        </p:spPr>
+        <p:txBody>
+          <a:bodyPr vert="horz" rtlCol="0">
+            <a:spAutoFit/>
+          </a:bodyPr>
+          <a:lstStyle/>
+          <a:p>
+            <a:pPr algn="ctr"/>
+            <a:r>
+              <a:rPr lang="fr-FR" sz="900">
+                <a:solidFill>
+                  <a:srgbClr val="B4B4B4"/>
+                </a:solidFill>
+              </a:rPr>
+              <a:t>(c) titi_23 - mediateur-numerique.github.io - Reproduction interdite sans autorisation</a:t>
+            </a:r>
+          </a:p>
+        </p:txBody>
+      </p:sp>
     </p:spTree>
   </p:cSld>
   <p:clrMapOvr>
@@ -5292,6 +5492,46 @@
           </a:p>
         </p:txBody>
       </p:sp>
+      <p:sp>
+        <p:nvSpPr>
+          <p:cNvPr id="28" name="ZoneTexte 27">
+            <a:extLst>
+              <a:ext uri="{FF2B5EF4-FFF2-40B4-BE49-F238E27FC236}">
+                <a16:creationId xmlns:a16="http://schemas.microsoft.com/office/drawing/2014/main" id="{DCB8DF30-68D9-3C6B-3159-03A838CBFB9A}"/>
+              </a:ext>
+            </a:extLst>
+          </p:cNvPr>
+          <p:cNvSpPr txBox="1"/>
+          <p:nvPr/>
+        </p:nvSpPr>
+        <p:spPr>
+          <a:xfrm>
+            <a:off x="0" y="6578600"/>
+            <a:ext cx="12192000" cy="230832"/>
+          </a:xfrm>
+          <a:prstGeom prst="rect">
+            <a:avLst/>
+          </a:prstGeom>
+          <a:noFill/>
+        </p:spPr>
+        <p:txBody>
+          <a:bodyPr vert="horz" rtlCol="0">
+            <a:spAutoFit/>
+          </a:bodyPr>
+          <a:lstStyle/>
+          <a:p>
+            <a:pPr algn="ctr"/>
+            <a:r>
+              <a:rPr lang="fr-FR" sz="900">
+                <a:solidFill>
+                  <a:srgbClr val="B4B4B4"/>
+                </a:solidFill>
+              </a:rPr>
+              <a:t>(c) titi_23 - mediateur-numerique.github.io - Reproduction interdite sans autorisation</a:t>
+            </a:r>
+          </a:p>
+        </p:txBody>
+      </p:sp>
     </p:spTree>
   </p:cSld>
   <p:clrMapOvr>
@@ -6357,6 +6597,46 @@
           </a:p>
         </p:txBody>
       </p:sp>
+      <p:sp>
+        <p:nvSpPr>
+          <p:cNvPr id="29" name="ZoneTexte 28">
+            <a:extLst>
+              <a:ext uri="{FF2B5EF4-FFF2-40B4-BE49-F238E27FC236}">
+                <a16:creationId xmlns:a16="http://schemas.microsoft.com/office/drawing/2014/main" id="{65A8A6C3-8BE0-3478-3B4A-E3376731F14A}"/>
+              </a:ext>
+            </a:extLst>
+          </p:cNvPr>
+          <p:cNvSpPr txBox="1"/>
+          <p:nvPr/>
+        </p:nvSpPr>
+        <p:spPr>
+          <a:xfrm>
+            <a:off x="0" y="6578600"/>
+            <a:ext cx="12192000" cy="230832"/>
+          </a:xfrm>
+          <a:prstGeom prst="rect">
+            <a:avLst/>
+          </a:prstGeom>
+          <a:noFill/>
+        </p:spPr>
+        <p:txBody>
+          <a:bodyPr vert="horz" rtlCol="0">
+            <a:spAutoFit/>
+          </a:bodyPr>
+          <a:lstStyle/>
+          <a:p>
+            <a:pPr algn="ctr"/>
+            <a:r>
+              <a:rPr lang="fr-FR" sz="900">
+                <a:solidFill>
+                  <a:srgbClr val="B4B4B4"/>
+                </a:solidFill>
+              </a:rPr>
+              <a:t>(c) titi_23 - mediateur-numerique.github.io - Reproduction interdite sans autorisation</a:t>
+            </a:r>
+          </a:p>
+        </p:txBody>
+      </p:sp>
     </p:spTree>
   </p:cSld>
   <p:clrMapOvr>
@@ -7422,6 +7702,46 @@
           </a:p>
         </p:txBody>
       </p:sp>
+      <p:sp>
+        <p:nvSpPr>
+          <p:cNvPr id="29" name="ZoneTexte 28">
+            <a:extLst>
+              <a:ext uri="{FF2B5EF4-FFF2-40B4-BE49-F238E27FC236}">
+                <a16:creationId xmlns:a16="http://schemas.microsoft.com/office/drawing/2014/main" id="{7A5C911C-084E-4215-71E0-961D9F745AE4}"/>
+              </a:ext>
+            </a:extLst>
+          </p:cNvPr>
+          <p:cNvSpPr txBox="1"/>
+          <p:nvPr/>
+        </p:nvSpPr>
+        <p:spPr>
+          <a:xfrm>
+            <a:off x="0" y="6578600"/>
+            <a:ext cx="12192000" cy="230832"/>
+          </a:xfrm>
+          <a:prstGeom prst="rect">
+            <a:avLst/>
+          </a:prstGeom>
+          <a:noFill/>
+        </p:spPr>
+        <p:txBody>
+          <a:bodyPr vert="horz" rtlCol="0">
+            <a:spAutoFit/>
+          </a:bodyPr>
+          <a:lstStyle/>
+          <a:p>
+            <a:pPr algn="ctr"/>
+            <a:r>
+              <a:rPr lang="fr-FR" sz="900">
+                <a:solidFill>
+                  <a:srgbClr val="B4B4B4"/>
+                </a:solidFill>
+              </a:rPr>
+              <a:t>(c) titi_23 - mediateur-numerique.github.io - Reproduction interdite sans autorisation</a:t>
+            </a:r>
+          </a:p>
+        </p:txBody>
+      </p:sp>
     </p:spTree>
   </p:cSld>
   <p:clrMapOvr>
@@ -8414,6 +8734,46 @@
           </a:p>
         </p:txBody>
       </p:sp>
+      <p:sp>
+        <p:nvSpPr>
+          <p:cNvPr id="27" name="ZoneTexte 26">
+            <a:extLst>
+              <a:ext uri="{FF2B5EF4-FFF2-40B4-BE49-F238E27FC236}">
+                <a16:creationId xmlns:a16="http://schemas.microsoft.com/office/drawing/2014/main" id="{CDD8E530-1E23-FA05-C252-9A692B5E252C}"/>
+              </a:ext>
+            </a:extLst>
+          </p:cNvPr>
+          <p:cNvSpPr txBox="1"/>
+          <p:nvPr/>
+        </p:nvSpPr>
+        <p:spPr>
+          <a:xfrm>
+            <a:off x="0" y="6578600"/>
+            <a:ext cx="12192000" cy="230832"/>
+          </a:xfrm>
+          <a:prstGeom prst="rect">
+            <a:avLst/>
+          </a:prstGeom>
+          <a:noFill/>
+        </p:spPr>
+        <p:txBody>
+          <a:bodyPr vert="horz" rtlCol="0">
+            <a:spAutoFit/>
+          </a:bodyPr>
+          <a:lstStyle/>
+          <a:p>
+            <a:pPr algn="ctr"/>
+            <a:r>
+              <a:rPr lang="fr-FR" sz="900">
+                <a:solidFill>
+                  <a:srgbClr val="B4B4B4"/>
+                </a:solidFill>
+              </a:rPr>
+              <a:t>(c) titi_23 - mediateur-numerique.github.io - Reproduction interdite sans autorisation</a:t>
+            </a:r>
+          </a:p>
+        </p:txBody>
+      </p:sp>
     </p:spTree>
   </p:cSld>
   <p:clrMapOvr>
@@ -9552,6 +9912,46 @@
           </a:p>
         </p:txBody>
       </p:sp>
+      <p:sp>
+        <p:nvSpPr>
+          <p:cNvPr id="31" name="ZoneTexte 30">
+            <a:extLst>
+              <a:ext uri="{FF2B5EF4-FFF2-40B4-BE49-F238E27FC236}">
+                <a16:creationId xmlns:a16="http://schemas.microsoft.com/office/drawing/2014/main" id="{0955A947-7DCE-7AAF-6A78-B62C80F1EB9D}"/>
+              </a:ext>
+            </a:extLst>
+          </p:cNvPr>
+          <p:cNvSpPr txBox="1"/>
+          <p:nvPr/>
+        </p:nvSpPr>
+        <p:spPr>
+          <a:xfrm>
+            <a:off x="0" y="6578600"/>
+            <a:ext cx="12192000" cy="230832"/>
+          </a:xfrm>
+          <a:prstGeom prst="rect">
+            <a:avLst/>
+          </a:prstGeom>
+          <a:noFill/>
+        </p:spPr>
+        <p:txBody>
+          <a:bodyPr vert="horz" rtlCol="0">
+            <a:spAutoFit/>
+          </a:bodyPr>
+          <a:lstStyle/>
+          <a:p>
+            <a:pPr algn="ctr"/>
+            <a:r>
+              <a:rPr lang="fr-FR" sz="900">
+                <a:solidFill>
+                  <a:srgbClr val="B4B4B4"/>
+                </a:solidFill>
+              </a:rPr>
+              <a:t>(c) titi_23 - mediateur-numerique.github.io - Reproduction interdite sans autorisation</a:t>
+            </a:r>
+          </a:p>
+        </p:txBody>
+      </p:sp>
     </p:spTree>
   </p:cSld>
   <p:clrMapOvr>
@@ -10541,6 +10941,46 @@
               <a:t>Le non-gage s'obtient gratuitement sur le même site. L'acheteur utilise le code de cession pour faire sa propre carte grise.</a:t>
             </a:r>
             <a:endParaRPr lang="en-US" sz="1100" dirty="0"/>
+          </a:p>
+        </p:txBody>
+      </p:sp>
+      <p:sp>
+        <p:nvSpPr>
+          <p:cNvPr id="27" name="ZoneTexte 26">
+            <a:extLst>
+              <a:ext uri="{FF2B5EF4-FFF2-40B4-BE49-F238E27FC236}">
+                <a16:creationId xmlns:a16="http://schemas.microsoft.com/office/drawing/2014/main" id="{A5B381AF-7AB0-2BD5-1919-9EC308F00E37}"/>
+              </a:ext>
+            </a:extLst>
+          </p:cNvPr>
+          <p:cNvSpPr txBox="1"/>
+          <p:nvPr/>
+        </p:nvSpPr>
+        <p:spPr>
+          <a:xfrm>
+            <a:off x="0" y="6578600"/>
+            <a:ext cx="12192000" cy="230832"/>
+          </a:xfrm>
+          <a:prstGeom prst="rect">
+            <a:avLst/>
+          </a:prstGeom>
+          <a:noFill/>
+        </p:spPr>
+        <p:txBody>
+          <a:bodyPr vert="horz" rtlCol="0">
+            <a:spAutoFit/>
+          </a:bodyPr>
+          <a:lstStyle/>
+          <a:p>
+            <a:pPr algn="ctr"/>
+            <a:r>
+              <a:rPr lang="fr-FR" sz="900">
+                <a:solidFill>
+                  <a:srgbClr val="B4B4B4"/>
+                </a:solidFill>
+              </a:rPr>
+              <a:t>(c) titi_23 - mediateur-numerique.github.io - Reproduction interdite sans autorisation</a:t>
+            </a:r>
           </a:p>
         </p:txBody>
       </p:sp>
